--- a/docs/Презентация обухов.pptx
+++ b/docs/Презентация обухов.pptx
@@ -11,6 +11,7 @@
     <p:sldId id="261" r:id="rId5"/>
     <p:sldId id="260" r:id="rId6"/>
     <p:sldId id="259" r:id="rId7"/>
+    <p:sldId id="262" r:id="rId8"/>
   </p:sldIdLst>
   <p:sldSz cx="12192000" cy="6858000"/>
   <p:notesSz cx="6858000" cy="9144000"/>
@@ -109,11 +110,6 @@
       </a:defRPr>
     </a:lvl9pPr>
   </p:defaultTextStyle>
-  <p:extLst>
-    <p:ext uri="{EFAFB233-063F-42B5-8137-9DF3F51BA10A}">
-      <p15:sldGuideLst xmlns:p15="http://schemas.microsoft.com/office/powerpoint/2012/main"/>
-    </p:ext>
-  </p:extLst>
 </p:presentation>
 </file>
 
@@ -3349,32 +3345,48 @@
         </p:nvSpPr>
         <p:spPr>
           <a:xfrm>
-            <a:off x="576943" y="402770"/>
-            <a:ext cx="11027228" cy="4278087"/>
+            <a:off x="1524000" y="1122363"/>
+            <a:ext cx="9144000" cy="2387600"/>
           </a:xfrm>
         </p:spPr>
         <p:txBody>
           <a:bodyPr>
-            <a:normAutofit/>
+            <a:normAutofit fontScale="90000"/>
           </a:bodyPr>
           <a:lstStyle/>
           <a:p>
             <a:r>
               <a:rPr lang="ru-RU" dirty="0"/>
-              <a:t>Тема: Автоматизация мониторинга распределенных информационно-управляющих систем с помощью</a:t>
-            </a:r>
-            <a:br>
+              <a:t>Тема: </a:t>
+            </a:r>
+            <a:r>
+              <a:rPr lang="en-US" dirty="0" err="1"/>
+              <a:t>eBPF</a:t>
+            </a:r>
+            <a:r>
+              <a:rPr lang="en-US" dirty="0"/>
+              <a:t>-</a:t>
+            </a:r>
+            <a:r>
               <a:rPr lang="ru-RU" dirty="0"/>
-            </a:br>
+              <a:t>трассировщик событий </a:t>
+            </a:r>
+            <a:r>
+              <a:rPr lang="ru-RU" dirty="0" err="1"/>
+              <a:t>ябра</a:t>
+            </a:r>
             <a:r>
               <a:rPr lang="ru-RU" dirty="0"/>
-              <a:t>событий ядра </a:t>
+              <a:t> </a:t>
             </a:r>
             <a:r>
               <a:rPr lang="en-US" dirty="0"/>
               <a:t>Linux</a:t>
             </a:r>
-            <a:endParaRPr lang="ru-RU" dirty="0"/>
+            <a:r>
+              <a:rPr lang="ru-RU" dirty="0"/>
+              <a:t> для мониторинга приложений</a:t>
+            </a:r>
           </a:p>
         </p:txBody>
       </p:sp>
@@ -3516,17 +3528,7 @@
           <a:p>
             <a:r>
               <a:rPr lang="ru-RU" dirty="0"/>
-              <a:t>Когда приложение работает внутри контейнера, обычных логов часто недостаточно: проблема возникнет на уровне системных вызовов, файловой системы, сети. При этом инженерам важно видеть события только нужного сервиса, а не всего сервера, и не потерять события при сбое клиентской программы. </a:t>
-            </a:r>
-          </a:p>
-          <a:p>
-            <a:r>
-              <a:rPr lang="ru-RU" dirty="0"/>
-              <a:t>Такого решения нет </a:t>
-            </a:r>
-            <a:r>
-              <a:rPr lang="ru-RU"/>
-              <a:t>на рынке.</a:t>
+              <a:t>Когда приложение работает внутри контейнера, обычных логов часто недостаточно: проблема возникнет на уровне системных вызовов, файловой системы, сети. При этом инженерам важно видеть события только нужного сервиса, а не всего сервера, и не потерять события при сбое клиентской программы.</a:t>
             </a:r>
             <a:br>
               <a:rPr lang="ru-RU" dirty="0"/>
@@ -3754,19 +3756,31 @@
           <a:p>
             <a:r>
               <a:rPr lang="ru-RU" dirty="0"/>
-              <a:t>Сотникова Ольга – Руководитель проекта</a:t>
+              <a:t>Сотникова Ольга – Глава проекта</a:t>
             </a:r>
           </a:p>
           <a:p>
             <a:r>
               <a:rPr lang="ru-RU" dirty="0"/>
-              <a:t>Обухов Юрий – разработчик-программист</a:t>
+              <a:t>Обухов Юрий – разработчик</a:t>
             </a:r>
           </a:p>
           <a:p>
             <a:r>
               <a:rPr lang="ru-RU" dirty="0"/>
-              <a:t>Ложкин Александр – Технический писатель</a:t>
+              <a:t>Ложкин Александр – Системный </a:t>
+            </a:r>
+            <a:r>
+              <a:rPr lang="ru-RU" dirty="0" err="1"/>
+              <a:t>аналатик</a:t>
+            </a:r>
+            <a:r>
+              <a:rPr lang="en-US" dirty="0"/>
+              <a:t>/</a:t>
+            </a:r>
+            <a:r>
+              <a:rPr lang="ru-RU" dirty="0"/>
+              <a:t>оформитель проекта</a:t>
             </a:r>
           </a:p>
         </p:txBody>
@@ -3947,6 +3961,12 @@
           <a:lstStyle/>
           <a:p>
             <a:r>
+              <a:rPr lang="ru-RU" dirty="0"/>
+              <a:t>Студенты- программисты</a:t>
+            </a:r>
+          </a:p>
+          <a:p>
+            <a:r>
               <a:rPr lang="en-US" dirty="0" err="1"/>
               <a:t>Devops</a:t>
             </a:r>
@@ -3958,15 +3978,7 @@
           <a:p>
             <a:r>
               <a:rPr lang="en-US" dirty="0"/>
-              <a:t>SRE</a:t>
-            </a:r>
-            <a:r>
-              <a:rPr lang="ru-RU" dirty="0"/>
-              <a:t> </a:t>
-            </a:r>
-            <a:r>
-              <a:rPr lang="en-US" dirty="0"/>
-              <a:t>- </a:t>
+              <a:t>SRE- </a:t>
             </a:r>
             <a:r>
               <a:rPr lang="ru-RU" dirty="0"/>
@@ -3985,6 +3997,122 @@
     <p:extLst>
       <p:ext uri="{BB962C8B-B14F-4D97-AF65-F5344CB8AC3E}">
         <p14:creationId xmlns:p14="http://schemas.microsoft.com/office/powerpoint/2010/main" val="3450941307"/>
+      </p:ext>
+    </p:extLst>
+  </p:cSld>
+  <p:clrMapOvr>
+    <a:masterClrMapping/>
+  </p:clrMapOvr>
+</p:sld>
+</file>
+
+<file path=ppt/slides/slide7.xml><?xml version="1.0" encoding="utf-8"?>
+<p:sld xmlns:a="http://schemas.openxmlformats.org/drawingml/2006/main" xmlns:r="http://schemas.openxmlformats.org/officeDocument/2006/relationships" xmlns:p="http://schemas.openxmlformats.org/presentationml/2006/main">
+  <p:cSld>
+    <p:spTree>
+      <p:nvGrpSpPr>
+        <p:cNvPr id="1" name=""/>
+        <p:cNvGrpSpPr/>
+        <p:nvPr/>
+      </p:nvGrpSpPr>
+      <p:grpSpPr>
+        <a:xfrm>
+          <a:off x="0" y="0"/>
+          <a:ext cx="0" cy="0"/>
+          <a:chOff x="0" y="0"/>
+          <a:chExt cx="0" cy="0"/>
+        </a:xfrm>
+      </p:grpSpPr>
+      <p:sp>
+        <p:nvSpPr>
+          <p:cNvPr id="2" name="Заголовок 1">
+            <a:extLst>
+              <a:ext uri="{FF2B5EF4-FFF2-40B4-BE49-F238E27FC236}">
+                <a16:creationId xmlns:a16="http://schemas.microsoft.com/office/drawing/2014/main" id="{225CB716-595A-39E4-911C-EC5EC6B79599}"/>
+              </a:ext>
+            </a:extLst>
+          </p:cNvPr>
+          <p:cNvSpPr>
+            <a:spLocks noGrp="1"/>
+          </p:cNvSpPr>
+          <p:nvPr>
+            <p:ph type="title"/>
+          </p:nvPr>
+        </p:nvSpPr>
+        <p:spPr/>
+        <p:txBody>
+          <a:bodyPr/>
+          <a:lstStyle/>
+          <a:p>
+            <a:r>
+              <a:rPr lang="ru-RU" dirty="0"/>
+              <a:t>Источники</a:t>
+            </a:r>
+          </a:p>
+        </p:txBody>
+      </p:sp>
+      <p:sp>
+        <p:nvSpPr>
+          <p:cNvPr id="3" name="Объект 2">
+            <a:extLst>
+              <a:ext uri="{FF2B5EF4-FFF2-40B4-BE49-F238E27FC236}">
+                <a16:creationId xmlns:a16="http://schemas.microsoft.com/office/drawing/2014/main" id="{1E20ED81-C61F-C4D1-C64F-AD88820D1BD1}"/>
+              </a:ext>
+            </a:extLst>
+          </p:cNvPr>
+          <p:cNvSpPr>
+            <a:spLocks noGrp="1"/>
+          </p:cNvSpPr>
+          <p:nvPr>
+            <p:ph idx="1"/>
+          </p:nvPr>
+        </p:nvSpPr>
+        <p:spPr/>
+        <p:txBody>
+          <a:bodyPr>
+            <a:normAutofit/>
+          </a:bodyPr>
+          <a:lstStyle/>
+          <a:p>
+            <a:pPr marL="0" indent="0">
+              <a:buNone/>
+            </a:pPr>
+            <a:r>
+              <a:rPr lang="ru-RU" sz="2000" dirty="0"/>
+              <a:t>1. Кетов, Д. В. Внутреннее устройство Linux / Д. В. Кетов. — 3-е изд., </a:t>
+            </a:r>
+            <a:r>
+              <a:rPr lang="ru-RU" sz="2000" dirty="0" err="1"/>
+              <a:t>перераб</a:t>
+            </a:r>
+            <a:r>
+              <a:rPr lang="ru-RU" sz="2000" dirty="0"/>
+              <a:t>. и доп. — Санкт-Петербург : БХВ-Петербург, 2024. — 447 с. — ISBN 978-5-9775-1843-7. — Текст : непосредственный.</a:t>
+            </a:r>
+          </a:p>
+          <a:p>
+            <a:pPr marL="0" indent="0">
+              <a:buNone/>
+            </a:pPr>
+            <a:r>
+              <a:rPr lang="ru-RU" sz="2000" dirty="0"/>
+              <a:t>2. Райс, Л. Изучаем </a:t>
+            </a:r>
+            <a:r>
+              <a:rPr lang="ru-RU" sz="2000" dirty="0" err="1"/>
+              <a:t>eBPF</a:t>
+            </a:r>
+            <a:r>
+              <a:rPr lang="ru-RU" sz="2000" dirty="0"/>
+              <a:t> / Л. Райс ; пер. с англ. — Санкт-Петербург : BHV-СПб, 2024. — 224 с. — ISBN 978-601-08-4118-5. — Текст : непосредственный.</a:t>
+            </a:r>
+          </a:p>
+        </p:txBody>
+      </p:sp>
+    </p:spTree>
+    <p:extLst>
+      <p:ext uri="{BB962C8B-B14F-4D97-AF65-F5344CB8AC3E}">
+        <p14:creationId xmlns:p14="http://schemas.microsoft.com/office/powerpoint/2010/main" val="465060072"/>
       </p:ext>
     </p:extLst>
   </p:cSld>
